--- a/curso_es/pptx/S35.pptx
+++ b/curso_es/pptx/S35.pptx
@@ -4335,7 +4335,7 @@
                 </a:solidFill>
                 <a:latin typeface="Fredoka"/>
               </a:rPr>
-              <a:t>Caso 3 · La cara de Maialen</a:t>
+              <a:t>Caso 3 · La cara de una compañera</a:t>
             </a:r>
           </a:p>
         </p:txBody>
@@ -4417,7 +4417,7 @@
                 </a:solidFill>
                 <a:latin typeface="Nunito Sans"/>
               </a:rPr>
-              <a:t>Alguien usa una aplicación para poner la cara de Maialen en un vídeo ridículo y lo pasa por el grupo de clase.</a:t>
+              <a:t>Alguien pone la cara de un presentador de la tele en un vídeo ridículo y lo sube a TikTok.</a:t>
             </a:r>
           </a:p>
         </p:txBody>
@@ -4490,7 +4490,7 @@
                 </a:solidFill>
                 <a:latin typeface="Nunito Sans"/>
               </a:rPr>
-              <a:t>Hace daño de verdad a Maialen, aunque «solo sea una broma».</a:t>
+              <a:t>Hace daño de verdad, aunque «solo sea una broma».</a:t>
             </a:r>
           </a:p>
           <a:p>
@@ -4515,7 +4515,7 @@
                 </a:solidFill>
                 <a:latin typeface="Nunito Sans"/>
               </a:rPr>
-              <a:t>Qué hago: no lo reenvío, se lo cuento a un adulto y apoyo a Maialen.</a:t>
+              <a:t>Qué hago: no lo reenvío, se lo cuento a un adulto y apoyo a esa compañera.</a:t>
             </a:r>
           </a:p>
           <a:p>
